--- a/slides/Chapter 12 - Public Policy (Lecture Deck).pptx
+++ b/slides/Chapter 12 - Public Policy (Lecture Deck).pptx
@@ -4406,92 +4406,6 @@
           </a:p>
         </p:txBody>
       </p:sp>
-      <p:sp>
-        <p:nvSpPr>
-          <p:cNvPr id="18" name="Shape 15"/>
-          <p:cNvSpPr/>
-          <p:nvPr/>
-        </p:nvSpPr>
-        <p:spPr>
-          <a:xfrm>
-            <a:off x="594360" y="6035040"/>
-            <a:ext cx="11002975" cy="411480"/>
-          </a:xfrm>
-          <a:prstGeom prst="roundRect">
-            <a:avLst>
-              <a:gd name="adj" fmla="val 15556"/>
-            </a:avLst>
-          </a:prstGeom>
-          <a:solidFill>
-            <a:srgbClr val="FFFFFF"/>
-          </a:solidFill>
-          <a:ln w="19050">
-            <a:solidFill>
-              <a:srgbClr val="B07D2B"/>
-            </a:solidFill>
-            <a:prstDash val="solid"/>
-          </a:ln>
-        </p:spPr>
-      </p:sp>
-      <p:sp>
-        <p:nvSpPr>
-          <p:cNvPr id="19" name="Text 16"/>
-          <p:cNvSpPr txBox="1"/>
-          <p:nvPr/>
-        </p:nvSpPr>
-        <p:spPr>
-          <a:xfrm>
-            <a:off x="868680" y="6199632"/>
-            <a:ext cx="10454335" cy="329184"/>
-          </a:xfrm>
-          <a:prstGeom prst="rect">
-            <a:avLst/>
-          </a:prstGeom>
-          <a:noFill/>
-          <a:ln/>
-        </p:spPr>
-        <p:txBody>
-          <a:bodyPr wrap="square" lIns="0" tIns="0" rIns="0" bIns="0" rtlCol="0" anchor="ctr"/>
-          <a:lstStyle/>
-          <a:p>
-            <a:pPr indent="0" marL="0">
-              <a:buNone/>
-            </a:pPr>
-            <a:endParaRPr lang="en-US" sz="1400" dirty="0"/>
-          </a:p>
-        </p:txBody>
-      </p:sp>
-      <p:sp>
-        <p:nvSpPr>
-          <p:cNvPr id="20" name="Text 17"/>
-          <p:cNvSpPr txBox="1"/>
-          <p:nvPr/>
-        </p:nvSpPr>
-        <p:spPr>
-          <a:xfrm>
-            <a:off x="868680" y="6565392"/>
-            <a:ext cx="10454335" cy="-301752"/>
-          </a:xfrm>
-          <a:prstGeom prst="rect">
-            <a:avLst/>
-          </a:prstGeom>
-          <a:noFill/>
-          <a:ln/>
-        </p:spPr>
-        <p:txBody>
-          <a:bodyPr wrap="square" lIns="0" tIns="0" rIns="0" bIns="0" rtlCol="0" anchor="ctr"/>
-          <a:lstStyle/>
-          <a:p>
-            <a:pPr indent="0" marL="0">
-              <a:lnSpc>
-                <a:spcPts val="1700"/>
-              </a:lnSpc>
-              <a:buNone/>
-            </a:pPr>
-            <a:endParaRPr lang="en-US" sz="1250" dirty="0"/>
-          </a:p>
-        </p:txBody>
-      </p:sp>
     </p:spTree>
   </p:cSld>
   <p:clrMapOvr>

--- a/slides/Chapter 12 - Public Policy (Lecture Deck).pptx
+++ b/slides/Chapter 12 - Public Policy (Lecture Deck).pptx
@@ -3528,7 +3528,7 @@
                 <a:ea typeface="Calibri" pitchFamily="34" charset="-122"/>
                 <a:cs typeface="Calibri" pitchFamily="34" charset="-120"/>
               </a:rPr>
-              <a:t>Texas leads the nation in oil and gas production and in wind power at the same time. It runs its own grid through ERCOT, largely outside federal regulation. After Winter Storm Uri in 2021 the Legislature mandated weatherization and created the Texas Energy Fund. The state regulates air and water through the TCEQ under authority delegated by the EPA, and has repeatedly litigated against federal environmental rules.</a:t>
+              <a:t>Texas leads the nation in oil and gas production and in wind power at the same time. It runs its own grid through ERCOT, largely outside federal regulation. After Winter Storm Uri in 2021 the Legislature mandated power-plant and gas-supply weatherization (SB 3), and in 2023 it created the $10 billion Texas Energy Fund, approved by voters as Proposition 7, to finance new dispatchable generation. The state regulates air and water through the TCEQ under authority delegated by the EPA, and has repeatedly litigated against federal environmental rules.</a:t>
             </a:r>
             <a:endParaRPr lang="en-US" sz="1250" dirty="0"/>
           </a:p>
@@ -12116,7 +12116,7 @@
                 <a:ea typeface="Calibri" pitchFamily="34" charset="-122"/>
                 <a:cs typeface="Calibri" pitchFamily="34" charset="-120"/>
               </a:rPr>
-              <a:t>House Bill 3 in 2019 raised the basic allotment and cut tax rates. House Bill 2 in 2025 raised it further, to roughly $6,215 per student.</a:t>
+              <a:t>House Bill 3 in 2019 raised the basic allotment from $5,140 to $6,160 and cut tax rates. House Bill 2 in 2025 ($8.5 billion) added only $55 to the base, to $6,215, and put most new money into targeted allotments such as experience-based teacher raises.</a:t>
             </a:r>
             <a:endParaRPr lang="en-US" sz="1200" dirty="0"/>
           </a:p>
@@ -12200,7 +12200,7 @@
                 <a:ea typeface="Calibri" pitchFamily="34" charset="-122"/>
                 <a:cs typeface="Calibri" pitchFamily="34" charset="-120"/>
               </a:rPr>
-              <a:t>Senate Bill 2 in 2025 created the state's first program letting families use public funds toward private schooling, after years of failed attempts.</a:t>
+              <a:t>Senate Bill 2 in 2025 created the state's first Education Savings Account program (Texas Education Freedom Accounts), after years of failed attempts. It launched in 2026-27: more than 274,000 students applied for about 110,000 funded slots under the $1 billion cap.</a:t>
             </a:r>
             <a:endParaRPr lang="en-US" sz="1200" dirty="0"/>
           </a:p>
